--- a/docs/figures/paper/world_model_sacflow_paper_figures_master.pptx
+++ b/docs/figures/paper/world_model_sacflow_paper_figures_master.pptx
@@ -4320,7 +4320,7 @@
                   <a:srgbClr val="111827"/>
                 </a:solidFill>
               </a:rPr>
-              <a:t>All formal metrics and media are regenerated from the world-model SAC Flow checkpoint, not renamed legacy PPO/MAPPO results.</a:t>
+              <a:t>All formal metrics and media are regenerated from the selected world-model SAC Flow checkpoint and strict replay audits.</a:t>
             </a:r>
             <a:endParaRPr lang="en-US" sz="1500"/>
           </a:p>
